--- a/Отчеты/Отчет_ИЗ1.pptx
+++ b/Отчеты/Отчет_ИЗ1.pptx
@@ -157,7 +157,7 @@
       </p:grpSpPr>
       <p:sp>
         <p:nvSpPr>
-          <p:cNvPr id="862643447" name="Header Placeholder 1"/>
+          <p:cNvPr id="952451707" name="Header Placeholder 1"/>
           <p:cNvSpPr>
             <a:spLocks noGrp="1"/>
           </p:cNvSpPr>
@@ -191,7 +191,7 @@
       </p:sp>
       <p:sp>
         <p:nvSpPr>
-          <p:cNvPr id="1073069618" name="Date Placeholder 2"/>
+          <p:cNvPr id="938170433" name="Date Placeholder 2"/>
           <p:cNvSpPr>
             <a:spLocks noGrp="1"/>
           </p:cNvSpPr>
@@ -229,7 +229,7 @@
       </p:sp>
       <p:sp>
         <p:nvSpPr>
-          <p:cNvPr id="1366423455" name="Slide Image Placeholder 3"/>
+          <p:cNvPr id="1610506274" name="Slide Image Placeholder 3"/>
           <p:cNvSpPr>
             <a:spLocks noChangeAspect="1" noGrp="1" noRot="1"/>
           </p:cNvSpPr>
@@ -265,7 +265,7 @@
       </p:sp>
       <p:sp>
         <p:nvSpPr>
-          <p:cNvPr id="1879765250" name="Notes Placeholder 4"/>
+          <p:cNvPr id="232805968" name="Notes Placeholder 4"/>
           <p:cNvSpPr>
             <a:spLocks noGrp="1"/>
           </p:cNvSpPr>
@@ -339,7 +339,7 @@
       </p:sp>
       <p:sp>
         <p:nvSpPr>
-          <p:cNvPr id="2117466182" name="Footer Placeholder 5"/>
+          <p:cNvPr id="1368928868" name="Footer Placeholder 5"/>
           <p:cNvSpPr>
             <a:spLocks noGrp="1"/>
           </p:cNvSpPr>
@@ -373,7 +373,7 @@
       </p:sp>
       <p:sp>
         <p:nvSpPr>
-          <p:cNvPr id="1788869200" name="Slide Number Placeholder 6"/>
+          <p:cNvPr id="76078322" name="Slide Number Placeholder 6"/>
           <p:cNvSpPr>
             <a:spLocks noGrp="1"/>
           </p:cNvSpPr>
@@ -526,7 +526,7 @@
       </p:grpSpPr>
       <p:sp>
         <p:nvSpPr>
-          <p:cNvPr id="1550931039" name="Slide Image Placeholder 1"/>
+          <p:cNvPr id="351163761" name="Slide Image Placeholder 1"/>
           <p:cNvSpPr>
             <a:spLocks noChangeAspect="1" noGrp="1" noRot="1"/>
           </p:cNvSpPr>
@@ -543,7 +543,7 @@
       </p:sp>
       <p:sp>
         <p:nvSpPr>
-          <p:cNvPr id="3438840" name="Notes Placeholder 2"/>
+          <p:cNvPr id="1646360265" name="Notes Placeholder 2"/>
           <p:cNvSpPr>
             <a:spLocks noGrp="1"/>
           </p:cNvSpPr>
@@ -568,7 +568,7 @@
       </p:sp>
       <p:sp>
         <p:nvSpPr>
-          <p:cNvPr id="2108436851" name="Slide Number Placeholder 3"/>
+          <p:cNvPr id="707325902" name="Slide Number Placeholder 3"/>
           <p:cNvSpPr>
             <a:spLocks noGrp="1"/>
           </p:cNvSpPr>
@@ -619,7 +619,7 @@
       </p:grpSpPr>
       <p:sp>
         <p:nvSpPr>
-          <p:cNvPr id="958535378" name="Slide Image Placeholder 1"/>
+          <p:cNvPr id="257443826" name="Slide Image Placeholder 1"/>
           <p:cNvSpPr>
             <a:spLocks noChangeAspect="1" noGrp="1" noRot="1"/>
           </p:cNvSpPr>
@@ -631,7 +631,7 @@
       </p:sp>
       <p:sp>
         <p:nvSpPr>
-          <p:cNvPr id="1924008384" name="Notes Placeholder 2"/>
+          <p:cNvPr id="337716394" name="Notes Placeholder 2"/>
           <p:cNvSpPr>
             <a:spLocks noGrp="1"/>
           </p:cNvSpPr>
@@ -653,7 +653,7 @@
       </p:sp>
       <p:sp>
         <p:nvSpPr>
-          <p:cNvPr id="1334973826" name="Slide Number Placeholder 3"/>
+          <p:cNvPr id="1501041812" name="Slide Number Placeholder 3"/>
           <p:cNvSpPr>
             <a:spLocks noGrp="1"/>
           </p:cNvSpPr>
@@ -704,7 +704,7 @@
       </p:grpSpPr>
       <p:sp>
         <p:nvSpPr>
-          <p:cNvPr id="52620706" name="Slide Image Placeholder 1"/>
+          <p:cNvPr id="2033790892" name="Slide Image Placeholder 1"/>
           <p:cNvSpPr>
             <a:spLocks noChangeAspect="1" noGrp="1" noRot="1"/>
           </p:cNvSpPr>
@@ -716,7 +716,7 @@
       </p:sp>
       <p:sp>
         <p:nvSpPr>
-          <p:cNvPr id="833220435" name="Notes Placeholder 2"/>
+          <p:cNvPr id="200733590" name="Notes Placeholder 2"/>
           <p:cNvSpPr>
             <a:spLocks noGrp="1"/>
           </p:cNvSpPr>
@@ -738,7 +738,7 @@
       </p:sp>
       <p:sp>
         <p:nvSpPr>
-          <p:cNvPr id="600654359" name="Slide Number Placeholder 3"/>
+          <p:cNvPr id="2106029006" name="Slide Number Placeholder 3"/>
           <p:cNvSpPr>
             <a:spLocks noGrp="1"/>
           </p:cNvSpPr>
@@ -789,7 +789,7 @@
       </p:grpSpPr>
       <p:sp>
         <p:nvSpPr>
-          <p:cNvPr id="1231979793" name="Slide Image Placeholder 1"/>
+          <p:cNvPr id="1975937128" name="Slide Image Placeholder 1"/>
           <p:cNvSpPr>
             <a:spLocks noChangeAspect="1" noGrp="1" noRot="1"/>
           </p:cNvSpPr>
@@ -801,7 +801,7 @@
       </p:sp>
       <p:sp>
         <p:nvSpPr>
-          <p:cNvPr id="411600572" name="Notes Placeholder 2"/>
+          <p:cNvPr id="863214001" name="Notes Placeholder 2"/>
           <p:cNvSpPr>
             <a:spLocks noGrp="1"/>
           </p:cNvSpPr>
@@ -823,7 +823,7 @@
       </p:sp>
       <p:sp>
         <p:nvSpPr>
-          <p:cNvPr id="1261438966" name="Slide Number Placeholder 3"/>
+          <p:cNvPr id="525313523" name="Slide Number Placeholder 3"/>
           <p:cNvSpPr>
             <a:spLocks noGrp="1"/>
           </p:cNvSpPr>
@@ -874,7 +874,7 @@
       </p:grpSpPr>
       <p:sp>
         <p:nvSpPr>
-          <p:cNvPr id="1273213135" name="Slide Image Placeholder 1"/>
+          <p:cNvPr id="196315561" name="Slide Image Placeholder 1"/>
           <p:cNvSpPr>
             <a:spLocks noChangeAspect="1" noGrp="1" noRot="1"/>
           </p:cNvSpPr>
@@ -886,7 +886,7 @@
       </p:sp>
       <p:sp>
         <p:nvSpPr>
-          <p:cNvPr id="1257492501" name="Notes Placeholder 2"/>
+          <p:cNvPr id="1778092970" name="Notes Placeholder 2"/>
           <p:cNvSpPr>
             <a:spLocks noGrp="1"/>
           </p:cNvSpPr>
@@ -908,7 +908,7 @@
       </p:sp>
       <p:sp>
         <p:nvSpPr>
-          <p:cNvPr id="1161390062" name="Slide Number Placeholder 3"/>
+          <p:cNvPr id="558143518" name="Slide Number Placeholder 3"/>
           <p:cNvSpPr>
             <a:spLocks noGrp="1"/>
           </p:cNvSpPr>
@@ -959,7 +959,7 @@
       </p:grpSpPr>
       <p:sp>
         <p:nvSpPr>
-          <p:cNvPr id="1408517587" name="Slide Image Placeholder 1"/>
+          <p:cNvPr id="553036831" name="Slide Image Placeholder 1"/>
           <p:cNvSpPr>
             <a:spLocks noChangeAspect="1" noGrp="1" noRot="1"/>
           </p:cNvSpPr>
@@ -971,7 +971,7 @@
       </p:sp>
       <p:sp>
         <p:nvSpPr>
-          <p:cNvPr id="71581326" name="Notes Placeholder 2"/>
+          <p:cNvPr id="1153699512" name="Notes Placeholder 2"/>
           <p:cNvSpPr>
             <a:spLocks noGrp="1"/>
           </p:cNvSpPr>
@@ -993,7 +993,7 @@
       </p:sp>
       <p:sp>
         <p:nvSpPr>
-          <p:cNvPr id="508464150" name="Slide Number Placeholder 3"/>
+          <p:cNvPr id="1933147716" name="Slide Number Placeholder 3"/>
           <p:cNvSpPr>
             <a:spLocks noGrp="1"/>
           </p:cNvSpPr>
@@ -1044,7 +1044,7 @@
       </p:grpSpPr>
       <p:sp>
         <p:nvSpPr>
-          <p:cNvPr id="807964632" name="Slide Image Placeholder 1"/>
+          <p:cNvPr id="357272925" name="Slide Image Placeholder 1"/>
           <p:cNvSpPr>
             <a:spLocks noChangeAspect="1" noGrp="1" noRot="1"/>
           </p:cNvSpPr>
@@ -1056,7 +1056,7 @@
       </p:sp>
       <p:sp>
         <p:nvSpPr>
-          <p:cNvPr id="1949929886" name="Notes Placeholder 2"/>
+          <p:cNvPr id="133764723" name="Notes Placeholder 2"/>
           <p:cNvSpPr>
             <a:spLocks noGrp="1"/>
           </p:cNvSpPr>
@@ -1078,7 +1078,7 @@
       </p:sp>
       <p:sp>
         <p:nvSpPr>
-          <p:cNvPr id="1631642336" name="Slide Number Placeholder 3"/>
+          <p:cNvPr id="1675958528" name="Slide Number Placeholder 3"/>
           <p:cNvSpPr>
             <a:spLocks noGrp="1"/>
           </p:cNvSpPr>
@@ -1129,7 +1129,7 @@
       </p:grpSpPr>
       <p:sp>
         <p:nvSpPr>
-          <p:cNvPr id="1668585404" name="Slide Image Placeholder 1"/>
+          <p:cNvPr id="1403803123" name="Slide Image Placeholder 1"/>
           <p:cNvSpPr>
             <a:spLocks noChangeAspect="1" noGrp="1" noRot="1"/>
           </p:cNvSpPr>
@@ -1141,7 +1141,7 @@
       </p:sp>
       <p:sp>
         <p:nvSpPr>
-          <p:cNvPr id="1521946947" name="Notes Placeholder 2"/>
+          <p:cNvPr id="95618563" name="Notes Placeholder 2"/>
           <p:cNvSpPr>
             <a:spLocks noGrp="1"/>
           </p:cNvSpPr>
@@ -1163,7 +1163,7 @@
       </p:sp>
       <p:sp>
         <p:nvSpPr>
-          <p:cNvPr id="832565405" name="Slide Number Placeholder 3"/>
+          <p:cNvPr id="838832830" name="Slide Number Placeholder 3"/>
           <p:cNvSpPr>
             <a:spLocks noGrp="1"/>
           </p:cNvSpPr>
@@ -1214,7 +1214,7 @@
       </p:grpSpPr>
       <p:sp>
         <p:nvSpPr>
-          <p:cNvPr id="256434912" name="Slide Image Placeholder 1"/>
+          <p:cNvPr id="393850222" name="Slide Image Placeholder 1"/>
           <p:cNvSpPr>
             <a:spLocks noChangeAspect="1" noGrp="1" noRot="1"/>
           </p:cNvSpPr>
@@ -1226,7 +1226,7 @@
       </p:sp>
       <p:sp>
         <p:nvSpPr>
-          <p:cNvPr id="132238187" name="Notes Placeholder 2"/>
+          <p:cNvPr id="355929247" name="Notes Placeholder 2"/>
           <p:cNvSpPr>
             <a:spLocks noGrp="1"/>
           </p:cNvSpPr>
@@ -1248,7 +1248,7 @@
       </p:sp>
       <p:sp>
         <p:nvSpPr>
-          <p:cNvPr id="113015599" name="Slide Number Placeholder 3"/>
+          <p:cNvPr id="772057874" name="Slide Number Placeholder 3"/>
           <p:cNvSpPr>
             <a:spLocks noGrp="1"/>
           </p:cNvSpPr>
@@ -1299,7 +1299,7 @@
       </p:grpSpPr>
       <p:sp>
         <p:nvSpPr>
-          <p:cNvPr id="1954775346" name="Slide Image Placeholder 1"/>
+          <p:cNvPr id="698690605" name="Slide Image Placeholder 1"/>
           <p:cNvSpPr>
             <a:spLocks noChangeAspect="1" noGrp="1" noRot="1"/>
           </p:cNvSpPr>
@@ -1311,7 +1311,7 @@
       </p:sp>
       <p:sp>
         <p:nvSpPr>
-          <p:cNvPr id="1593296126" name="Notes Placeholder 2"/>
+          <p:cNvPr id="571841712" name="Notes Placeholder 2"/>
           <p:cNvSpPr>
             <a:spLocks noGrp="1"/>
           </p:cNvSpPr>
@@ -1333,7 +1333,7 @@
       </p:sp>
       <p:sp>
         <p:nvSpPr>
-          <p:cNvPr id="1593484259" name="Slide Number Placeholder 3"/>
+          <p:cNvPr id="2143109078" name="Slide Number Placeholder 3"/>
           <p:cNvSpPr>
             <a:spLocks noGrp="1"/>
           </p:cNvSpPr>
@@ -1384,7 +1384,7 @@
       </p:grpSpPr>
       <p:sp>
         <p:nvSpPr>
-          <p:cNvPr id="1111011508" name="Slide Image Placeholder 1"/>
+          <p:cNvPr id="380115475" name="Slide Image Placeholder 1"/>
           <p:cNvSpPr>
             <a:spLocks noChangeAspect="1" noGrp="1" noRot="1"/>
           </p:cNvSpPr>
@@ -1396,7 +1396,7 @@
       </p:sp>
       <p:sp>
         <p:nvSpPr>
-          <p:cNvPr id="412460594" name="Notes Placeholder 2"/>
+          <p:cNvPr id="993419153" name="Notes Placeholder 2"/>
           <p:cNvSpPr>
             <a:spLocks noGrp="1"/>
           </p:cNvSpPr>
@@ -1418,7 +1418,7 @@
       </p:sp>
       <p:sp>
         <p:nvSpPr>
-          <p:cNvPr id="329046850" name="Slide Number Placeholder 3"/>
+          <p:cNvPr id="439677561" name="Slide Number Placeholder 3"/>
           <p:cNvSpPr>
             <a:spLocks noGrp="1"/>
           </p:cNvSpPr>
@@ -1469,7 +1469,7 @@
       </p:grpSpPr>
       <p:sp>
         <p:nvSpPr>
-          <p:cNvPr id="520050416" name="Slide Image Placeholder 1"/>
+          <p:cNvPr id="1479741074" name="Slide Image Placeholder 1"/>
           <p:cNvSpPr>
             <a:spLocks noChangeAspect="1" noGrp="1" noRot="1"/>
           </p:cNvSpPr>
@@ -1481,7 +1481,7 @@
       </p:sp>
       <p:sp>
         <p:nvSpPr>
-          <p:cNvPr id="940150986" name="Notes Placeholder 2"/>
+          <p:cNvPr id="1982794370" name="Notes Placeholder 2"/>
           <p:cNvSpPr>
             <a:spLocks noGrp="1"/>
           </p:cNvSpPr>
@@ -1503,7 +1503,7 @@
       </p:sp>
       <p:sp>
         <p:nvSpPr>
-          <p:cNvPr id="458814354" name="Slide Number Placeholder 3"/>
+          <p:cNvPr id="12974655" name="Slide Number Placeholder 3"/>
           <p:cNvSpPr>
             <a:spLocks noGrp="1"/>
           </p:cNvSpPr>
@@ -1554,7 +1554,7 @@
       </p:grpSpPr>
       <p:sp>
         <p:nvSpPr>
-          <p:cNvPr id="489363954" name="Slide Image Placeholder 1"/>
+          <p:cNvPr id="1653461377" name="Slide Image Placeholder 1"/>
           <p:cNvSpPr>
             <a:spLocks noChangeAspect="1" noGrp="1" noRot="1"/>
           </p:cNvSpPr>
@@ -1566,7 +1566,7 @@
       </p:sp>
       <p:sp>
         <p:nvSpPr>
-          <p:cNvPr id="2139068914" name="Notes Placeholder 2"/>
+          <p:cNvPr id="1388878979" name="Notes Placeholder 2"/>
           <p:cNvSpPr>
             <a:spLocks noGrp="1"/>
           </p:cNvSpPr>
@@ -1588,7 +1588,7 @@
       </p:sp>
       <p:sp>
         <p:nvSpPr>
-          <p:cNvPr id="605163679" name="Slide Number Placeholder 3"/>
+          <p:cNvPr id="1968584138" name="Slide Number Placeholder 3"/>
           <p:cNvSpPr>
             <a:spLocks noGrp="1"/>
           </p:cNvSpPr>
@@ -1639,7 +1639,7 @@
       </p:grpSpPr>
       <p:sp>
         <p:nvSpPr>
-          <p:cNvPr id="1234584273" name="Slide Image Placeholder 1"/>
+          <p:cNvPr id="1152486073" name="Slide Image Placeholder 1"/>
           <p:cNvSpPr>
             <a:spLocks noChangeAspect="1" noGrp="1" noRot="1"/>
           </p:cNvSpPr>
@@ -1651,7 +1651,7 @@
       </p:sp>
       <p:sp>
         <p:nvSpPr>
-          <p:cNvPr id="1783190062" name="Notes Placeholder 2"/>
+          <p:cNvPr id="2131744002" name="Notes Placeholder 2"/>
           <p:cNvSpPr>
             <a:spLocks noGrp="1"/>
           </p:cNvSpPr>
@@ -1673,7 +1673,7 @@
       </p:sp>
       <p:sp>
         <p:nvSpPr>
-          <p:cNvPr id="42587985" name="Slide Number Placeholder 3"/>
+          <p:cNvPr id="1691676289" name="Slide Number Placeholder 3"/>
           <p:cNvSpPr>
             <a:spLocks noGrp="1"/>
           </p:cNvSpPr>
@@ -1724,7 +1724,7 @@
       </p:grpSpPr>
       <p:sp>
         <p:nvSpPr>
-          <p:cNvPr id="1700686996" name="Slide Image Placeholder 1"/>
+          <p:cNvPr id="472417022" name="Slide Image Placeholder 1"/>
           <p:cNvSpPr>
             <a:spLocks noChangeAspect="1" noGrp="1" noRot="1"/>
           </p:cNvSpPr>
@@ -1736,7 +1736,7 @@
       </p:sp>
       <p:sp>
         <p:nvSpPr>
-          <p:cNvPr id="1104381035" name="Notes Placeholder 2"/>
+          <p:cNvPr id="1575590591" name="Notes Placeholder 2"/>
           <p:cNvSpPr>
             <a:spLocks noGrp="1"/>
           </p:cNvSpPr>
@@ -1758,7 +1758,7 @@
       </p:sp>
       <p:sp>
         <p:nvSpPr>
-          <p:cNvPr id="753030221" name="Slide Number Placeholder 3"/>
+          <p:cNvPr id="362417148" name="Slide Number Placeholder 3"/>
           <p:cNvSpPr>
             <a:spLocks noGrp="1"/>
           </p:cNvSpPr>
@@ -1809,7 +1809,7 @@
       </p:grpSpPr>
       <p:sp>
         <p:nvSpPr>
-          <p:cNvPr id="930644612" name="Slide Image Placeholder 1"/>
+          <p:cNvPr id="960167688" name="Slide Image Placeholder 1"/>
           <p:cNvSpPr>
             <a:spLocks noChangeAspect="1" noGrp="1" noRot="1"/>
           </p:cNvSpPr>
@@ -1821,7 +1821,7 @@
       </p:sp>
       <p:sp>
         <p:nvSpPr>
-          <p:cNvPr id="854738176" name="Notes Placeholder 2"/>
+          <p:cNvPr id="1855129599" name="Notes Placeholder 2"/>
           <p:cNvSpPr>
             <a:spLocks noGrp="1"/>
           </p:cNvSpPr>
@@ -1843,7 +1843,7 @@
       </p:sp>
       <p:sp>
         <p:nvSpPr>
-          <p:cNvPr id="1874549532" name="Slide Number Placeholder 3"/>
+          <p:cNvPr id="1782044159" name="Slide Number Placeholder 3"/>
           <p:cNvSpPr>
             <a:spLocks noGrp="1"/>
           </p:cNvSpPr>
@@ -1894,7 +1894,7 @@
       </p:grpSpPr>
       <p:sp>
         <p:nvSpPr>
-          <p:cNvPr id="281953964" name="Slide Image Placeholder 1"/>
+          <p:cNvPr id="1140752383" name="Slide Image Placeholder 1"/>
           <p:cNvSpPr>
             <a:spLocks noChangeAspect="1" noGrp="1" noRot="1"/>
           </p:cNvSpPr>
@@ -1906,7 +1906,7 @@
       </p:sp>
       <p:sp>
         <p:nvSpPr>
-          <p:cNvPr id="202719648" name="Notes Placeholder 2"/>
+          <p:cNvPr id="1867878488" name="Notes Placeholder 2"/>
           <p:cNvSpPr>
             <a:spLocks noGrp="1"/>
           </p:cNvSpPr>
@@ -1928,7 +1928,7 @@
       </p:sp>
       <p:sp>
         <p:nvSpPr>
-          <p:cNvPr id="108915495" name="Slide Number Placeholder 3"/>
+          <p:cNvPr id="1940463893" name="Slide Number Placeholder 3"/>
           <p:cNvSpPr>
             <a:spLocks noGrp="1"/>
           </p:cNvSpPr>
@@ -1979,7 +1979,7 @@
       </p:grpSpPr>
       <p:sp>
         <p:nvSpPr>
-          <p:cNvPr id="526412434" name="Slide Image Placeholder 1"/>
+          <p:cNvPr id="471506614" name="Slide Image Placeholder 1"/>
           <p:cNvSpPr>
             <a:spLocks noChangeAspect="1" noGrp="1" noRot="1"/>
           </p:cNvSpPr>
@@ -1991,7 +1991,7 @@
       </p:sp>
       <p:sp>
         <p:nvSpPr>
-          <p:cNvPr id="352638998" name="Notes Placeholder 2"/>
+          <p:cNvPr id="2124487447" name="Notes Placeholder 2"/>
           <p:cNvSpPr>
             <a:spLocks noGrp="1"/>
           </p:cNvSpPr>
@@ -2013,7 +2013,7 @@
       </p:sp>
       <p:sp>
         <p:nvSpPr>
-          <p:cNvPr id="728884608" name="Slide Number Placeholder 3"/>
+          <p:cNvPr id="1052473476" name="Slide Number Placeholder 3"/>
           <p:cNvSpPr>
             <a:spLocks noGrp="1"/>
           </p:cNvSpPr>
@@ -2064,7 +2064,7 @@
       </p:grpSpPr>
       <p:sp>
         <p:nvSpPr>
-          <p:cNvPr id="434616458" name="Slide Image Placeholder 1"/>
+          <p:cNvPr id="1060523293" name="Slide Image Placeholder 1"/>
           <p:cNvSpPr>
             <a:spLocks noChangeAspect="1" noGrp="1" noRot="1"/>
           </p:cNvSpPr>
@@ -2076,7 +2076,7 @@
       </p:sp>
       <p:sp>
         <p:nvSpPr>
-          <p:cNvPr id="2004301101" name="Notes Placeholder 2"/>
+          <p:cNvPr id="1675092991" name="Notes Placeholder 2"/>
           <p:cNvSpPr>
             <a:spLocks noGrp="1"/>
           </p:cNvSpPr>
@@ -2098,7 +2098,7 @@
       </p:sp>
       <p:sp>
         <p:nvSpPr>
-          <p:cNvPr id="1971304311" name="Slide Number Placeholder 3"/>
+          <p:cNvPr id="2092329574" name="Slide Number Placeholder 3"/>
           <p:cNvSpPr>
             <a:spLocks noGrp="1"/>
           </p:cNvSpPr>
@@ -2149,7 +2149,7 @@
       </p:grpSpPr>
       <p:sp>
         <p:nvSpPr>
-          <p:cNvPr id="428349962" name="Slide Image Placeholder 1"/>
+          <p:cNvPr id="1287330600" name="Slide Image Placeholder 1"/>
           <p:cNvSpPr>
             <a:spLocks noChangeAspect="1" noGrp="1" noRot="1"/>
           </p:cNvSpPr>
@@ -2161,7 +2161,7 @@
       </p:sp>
       <p:sp>
         <p:nvSpPr>
-          <p:cNvPr id="1538548546" name="Notes Placeholder 2"/>
+          <p:cNvPr id="116945082" name="Notes Placeholder 2"/>
           <p:cNvSpPr>
             <a:spLocks noGrp="1"/>
           </p:cNvSpPr>
@@ -2183,7 +2183,7 @@
       </p:sp>
       <p:sp>
         <p:nvSpPr>
-          <p:cNvPr id="402578291" name="Slide Number Placeholder 3"/>
+          <p:cNvPr id="749604121" name="Slide Number Placeholder 3"/>
           <p:cNvSpPr>
             <a:spLocks noGrp="1"/>
           </p:cNvSpPr>
@@ -2234,7 +2234,7 @@
       </p:grpSpPr>
       <p:sp>
         <p:nvSpPr>
-          <p:cNvPr id="412567835" name="Slide Image Placeholder 1"/>
+          <p:cNvPr id="1552859007" name="Slide Image Placeholder 1"/>
           <p:cNvSpPr>
             <a:spLocks noChangeAspect="1" noGrp="1" noRot="1"/>
           </p:cNvSpPr>
@@ -2246,7 +2246,7 @@
       </p:sp>
       <p:sp>
         <p:nvSpPr>
-          <p:cNvPr id="1554855763" name="Notes Placeholder 2"/>
+          <p:cNvPr id="1452826853" name="Notes Placeholder 2"/>
           <p:cNvSpPr>
             <a:spLocks noGrp="1"/>
           </p:cNvSpPr>
@@ -2268,7 +2268,7 @@
       </p:sp>
       <p:sp>
         <p:nvSpPr>
-          <p:cNvPr id="154009025" name="Slide Number Placeholder 3"/>
+          <p:cNvPr id="1912874550" name="Slide Number Placeholder 3"/>
           <p:cNvSpPr>
             <a:spLocks noGrp="1"/>
           </p:cNvSpPr>
@@ -2319,7 +2319,7 @@
       </p:grpSpPr>
       <p:sp>
         <p:nvSpPr>
-          <p:cNvPr id="28997661" name="Slide Image Placeholder 1"/>
+          <p:cNvPr id="837855188" name="Slide Image Placeholder 1"/>
           <p:cNvSpPr>
             <a:spLocks noChangeAspect="1" noGrp="1" noRot="1"/>
           </p:cNvSpPr>
@@ -2331,7 +2331,7 @@
       </p:sp>
       <p:sp>
         <p:nvSpPr>
-          <p:cNvPr id="1061346696" name="Notes Placeholder 2"/>
+          <p:cNvPr id="1299126266" name="Notes Placeholder 2"/>
           <p:cNvSpPr>
             <a:spLocks noGrp="1"/>
           </p:cNvSpPr>
@@ -2353,7 +2353,7 @@
       </p:sp>
       <p:sp>
         <p:nvSpPr>
-          <p:cNvPr id="948571609" name="Slide Number Placeholder 3"/>
+          <p:cNvPr id="176870152" name="Slide Number Placeholder 3"/>
           <p:cNvSpPr>
             <a:spLocks noGrp="1"/>
           </p:cNvSpPr>
@@ -2404,7 +2404,7 @@
       </p:grpSpPr>
       <p:sp>
         <p:nvSpPr>
-          <p:cNvPr id="1106737104" name="Slide Image Placeholder 1"/>
+          <p:cNvPr id="1538844058" name="Slide Image Placeholder 1"/>
           <p:cNvSpPr>
             <a:spLocks noChangeAspect="1" noGrp="1" noRot="1"/>
           </p:cNvSpPr>
@@ -2416,7 +2416,7 @@
       </p:sp>
       <p:sp>
         <p:nvSpPr>
-          <p:cNvPr id="1899280181" name="Notes Placeholder 2"/>
+          <p:cNvPr id="897387519" name="Notes Placeholder 2"/>
           <p:cNvSpPr>
             <a:spLocks noGrp="1"/>
           </p:cNvSpPr>
@@ -2438,7 +2438,7 @@
       </p:sp>
       <p:sp>
         <p:nvSpPr>
-          <p:cNvPr id="1752533900" name="Slide Number Placeholder 3"/>
+          <p:cNvPr id="2097587844" name="Slide Number Placeholder 3"/>
           <p:cNvSpPr>
             <a:spLocks noGrp="1"/>
           </p:cNvSpPr>
@@ -2489,7 +2489,7 @@
       </p:grpSpPr>
       <p:sp>
         <p:nvSpPr>
-          <p:cNvPr id="56607614" name="Slide Image Placeholder 1"/>
+          <p:cNvPr id="247684507" name="Slide Image Placeholder 1"/>
           <p:cNvSpPr>
             <a:spLocks noChangeAspect="1" noGrp="1" noRot="1"/>
           </p:cNvSpPr>
@@ -2501,7 +2501,7 @@
       </p:sp>
       <p:sp>
         <p:nvSpPr>
-          <p:cNvPr id="920398718" name="Notes Placeholder 2"/>
+          <p:cNvPr id="358195981" name="Notes Placeholder 2"/>
           <p:cNvSpPr>
             <a:spLocks noGrp="1"/>
           </p:cNvSpPr>
@@ -2523,7 +2523,7 @@
       </p:sp>
       <p:sp>
         <p:nvSpPr>
-          <p:cNvPr id="2127071526" name="Slide Number Placeholder 3"/>
+          <p:cNvPr id="38995577" name="Slide Number Placeholder 3"/>
           <p:cNvSpPr>
             <a:spLocks noGrp="1"/>
           </p:cNvSpPr>
@@ -2574,7 +2574,7 @@
       </p:grpSpPr>
       <p:sp>
         <p:nvSpPr>
-          <p:cNvPr id="898794056" name="Title 1"/>
+          <p:cNvPr id="46560872" name="Title 1"/>
           <p:cNvSpPr>
             <a:spLocks noGrp="1"/>
           </p:cNvSpPr>
@@ -2609,7 +2609,7 @@
       </p:sp>
       <p:sp>
         <p:nvSpPr>
-          <p:cNvPr id="880701993" name="Subtitle 2"/>
+          <p:cNvPr id="662199809" name="Subtitle 2"/>
           <p:cNvSpPr>
             <a:spLocks noGrp="1"/>
           </p:cNvSpPr>
@@ -2677,7 +2677,7 @@
       </p:sp>
       <p:sp>
         <p:nvSpPr>
-          <p:cNvPr id="1907731181" name="Date Placeholder 3"/>
+          <p:cNvPr id="2011584730" name="Date Placeholder 3"/>
           <p:cNvSpPr>
             <a:spLocks noGrp="1"/>
           </p:cNvSpPr>
@@ -2703,7 +2703,7 @@
       </p:sp>
       <p:sp>
         <p:nvSpPr>
-          <p:cNvPr id="1600678069" name="Footer Placeholder 4"/>
+          <p:cNvPr id="1322604761" name="Footer Placeholder 4"/>
           <p:cNvSpPr>
             <a:spLocks noGrp="1"/>
           </p:cNvSpPr>
@@ -2725,7 +2725,7 @@
       </p:sp>
       <p:sp>
         <p:nvSpPr>
-          <p:cNvPr id="52048473" name="Slide Number Placeholder 5"/>
+          <p:cNvPr id="2010790939" name="Slide Number Placeholder 5"/>
           <p:cNvSpPr>
             <a:spLocks noGrp="1"/>
           </p:cNvSpPr>
@@ -2776,7 +2776,7 @@
       </p:grpSpPr>
       <p:sp>
         <p:nvSpPr>
-          <p:cNvPr id="552349557" name="Title 1"/>
+          <p:cNvPr id="707859197" name="Title 1"/>
           <p:cNvSpPr>
             <a:spLocks noGrp="1"/>
           </p:cNvSpPr>
@@ -2802,7 +2802,7 @@
       </p:sp>
       <p:sp>
         <p:nvSpPr>
-          <p:cNvPr id="860916947" name="Vertical Text Placeholder 2"/>
+          <p:cNvPr id="1294305452" name="Vertical Text Placeholder 2"/>
           <p:cNvSpPr>
             <a:spLocks noGrp="1"/>
           </p:cNvSpPr>
@@ -2868,7 +2868,7 @@
       </p:sp>
       <p:sp>
         <p:nvSpPr>
-          <p:cNvPr id="1081963465" name="Date Placeholder 3"/>
+          <p:cNvPr id="1479711562" name="Date Placeholder 3"/>
           <p:cNvSpPr>
             <a:spLocks noGrp="1"/>
           </p:cNvSpPr>
@@ -2894,7 +2894,7 @@
       </p:sp>
       <p:sp>
         <p:nvSpPr>
-          <p:cNvPr id="1986882654" name="Footer Placeholder 4"/>
+          <p:cNvPr id="1092623432" name="Footer Placeholder 4"/>
           <p:cNvSpPr>
             <a:spLocks noGrp="1"/>
           </p:cNvSpPr>
@@ -2916,7 +2916,7 @@
       </p:sp>
       <p:sp>
         <p:nvSpPr>
-          <p:cNvPr id="1555812048" name="Slide Number Placeholder 5"/>
+          <p:cNvPr id="1683461490" name="Slide Number Placeholder 5"/>
           <p:cNvSpPr>
             <a:spLocks noGrp="1"/>
           </p:cNvSpPr>
@@ -2967,7 +2967,7 @@
       </p:grpSpPr>
       <p:sp>
         <p:nvSpPr>
-          <p:cNvPr id="1723381500" name="Vertical Title 1"/>
+          <p:cNvPr id="1191260434" name="Vertical Title 1"/>
           <p:cNvSpPr>
             <a:spLocks noGrp="1"/>
           </p:cNvSpPr>
@@ -2998,7 +2998,7 @@
       </p:sp>
       <p:sp>
         <p:nvSpPr>
-          <p:cNvPr id="360498811" name="Vertical Text Placeholder 2"/>
+          <p:cNvPr id="793280386" name="Vertical Text Placeholder 2"/>
           <p:cNvSpPr>
             <a:spLocks noGrp="1"/>
           </p:cNvSpPr>
@@ -3069,7 +3069,7 @@
       </p:sp>
       <p:sp>
         <p:nvSpPr>
-          <p:cNvPr id="557307152" name="Date Placeholder 3"/>
+          <p:cNvPr id="1271133633" name="Date Placeholder 3"/>
           <p:cNvSpPr>
             <a:spLocks noGrp="1"/>
           </p:cNvSpPr>
@@ -3095,7 +3095,7 @@
       </p:sp>
       <p:sp>
         <p:nvSpPr>
-          <p:cNvPr id="2077503926" name="Footer Placeholder 4"/>
+          <p:cNvPr id="227453831" name="Footer Placeholder 4"/>
           <p:cNvSpPr>
             <a:spLocks noGrp="1"/>
           </p:cNvSpPr>
@@ -3117,7 +3117,7 @@
       </p:sp>
       <p:sp>
         <p:nvSpPr>
-          <p:cNvPr id="1379963601" name="Slide Number Placeholder 5"/>
+          <p:cNvPr id="1823378979" name="Slide Number Placeholder 5"/>
           <p:cNvSpPr>
             <a:spLocks noGrp="1"/>
           </p:cNvSpPr>
@@ -3168,7 +3168,7 @@
       </p:grpSpPr>
       <p:sp>
         <p:nvSpPr>
-          <p:cNvPr id="1416851561" name="Title 1"/>
+          <p:cNvPr id="1540178804" name="Title 1"/>
           <p:cNvSpPr>
             <a:spLocks noGrp="1"/>
           </p:cNvSpPr>
@@ -3194,7 +3194,7 @@
       </p:sp>
       <p:sp>
         <p:nvSpPr>
-          <p:cNvPr id="1545581817" name="Content Placeholder 2"/>
+          <p:cNvPr id="976318060" name="Content Placeholder 2"/>
           <p:cNvSpPr>
             <a:spLocks noGrp="1"/>
           </p:cNvSpPr>
@@ -3260,7 +3260,7 @@
       </p:sp>
       <p:sp>
         <p:nvSpPr>
-          <p:cNvPr id="194690062" name="Date Placeholder 3"/>
+          <p:cNvPr id="279900686" name="Date Placeholder 3"/>
           <p:cNvSpPr>
             <a:spLocks noGrp="1"/>
           </p:cNvSpPr>
@@ -3286,7 +3286,7 @@
       </p:sp>
       <p:sp>
         <p:nvSpPr>
-          <p:cNvPr id="689522883" name="Footer Placeholder 4"/>
+          <p:cNvPr id="605162261" name="Footer Placeholder 4"/>
           <p:cNvSpPr>
             <a:spLocks noGrp="1"/>
           </p:cNvSpPr>
@@ -3308,7 +3308,7 @@
       </p:sp>
       <p:sp>
         <p:nvSpPr>
-          <p:cNvPr id="655092078" name="Slide Number Placeholder 5"/>
+          <p:cNvPr id="1819185646" name="Slide Number Placeholder 5"/>
           <p:cNvSpPr>
             <a:spLocks noGrp="1"/>
           </p:cNvSpPr>
@@ -3359,7 +3359,7 @@
       </p:grpSpPr>
       <p:sp>
         <p:nvSpPr>
-          <p:cNvPr id="127315454" name="Title 1"/>
+          <p:cNvPr id="1532697940" name="Title 1"/>
           <p:cNvSpPr>
             <a:spLocks noGrp="1"/>
           </p:cNvSpPr>
@@ -3394,7 +3394,7 @@
       </p:sp>
       <p:sp>
         <p:nvSpPr>
-          <p:cNvPr id="971657438" name="Text Placeholder 2"/>
+          <p:cNvPr id="583505681" name="Text Placeholder 2"/>
           <p:cNvSpPr>
             <a:spLocks noGrp="1"/>
           </p:cNvSpPr>
@@ -3516,7 +3516,7 @@
       </p:sp>
       <p:sp>
         <p:nvSpPr>
-          <p:cNvPr id="818635205" name="Date Placeholder 3"/>
+          <p:cNvPr id="1333895946" name="Date Placeholder 3"/>
           <p:cNvSpPr>
             <a:spLocks noGrp="1"/>
           </p:cNvSpPr>
@@ -3542,7 +3542,7 @@
       </p:sp>
       <p:sp>
         <p:nvSpPr>
-          <p:cNvPr id="1524139850" name="Footer Placeholder 4"/>
+          <p:cNvPr id="102890367" name="Footer Placeholder 4"/>
           <p:cNvSpPr>
             <a:spLocks noGrp="1"/>
           </p:cNvSpPr>
@@ -3564,7 +3564,7 @@
       </p:sp>
       <p:sp>
         <p:nvSpPr>
-          <p:cNvPr id="1831605331" name="Slide Number Placeholder 5"/>
+          <p:cNvPr id="366331451" name="Slide Number Placeholder 5"/>
           <p:cNvSpPr>
             <a:spLocks noGrp="1"/>
           </p:cNvSpPr>
@@ -3615,7 +3615,7 @@
       </p:grpSpPr>
       <p:sp>
         <p:nvSpPr>
-          <p:cNvPr id="487584518" name="Title 1"/>
+          <p:cNvPr id="1653696050" name="Title 1"/>
           <p:cNvSpPr>
             <a:spLocks noGrp="1"/>
           </p:cNvSpPr>
@@ -3641,7 +3641,7 @@
       </p:sp>
       <p:sp>
         <p:nvSpPr>
-          <p:cNvPr id="1527389134" name="Content Placeholder 2"/>
+          <p:cNvPr id="435602966" name="Content Placeholder 2"/>
           <p:cNvSpPr>
             <a:spLocks noGrp="1"/>
           </p:cNvSpPr>
@@ -3712,7 +3712,7 @@
       </p:sp>
       <p:sp>
         <p:nvSpPr>
-          <p:cNvPr id="1501012900" name="Content Placeholder 3"/>
+          <p:cNvPr id="1486908535" name="Content Placeholder 3"/>
           <p:cNvSpPr>
             <a:spLocks noGrp="1"/>
           </p:cNvSpPr>
@@ -3783,7 +3783,7 @@
       </p:sp>
       <p:sp>
         <p:nvSpPr>
-          <p:cNvPr id="60361441" name="Date Placeholder 4"/>
+          <p:cNvPr id="1981536097" name="Date Placeholder 4"/>
           <p:cNvSpPr>
             <a:spLocks noGrp="1"/>
           </p:cNvSpPr>
@@ -3809,7 +3809,7 @@
       </p:sp>
       <p:sp>
         <p:nvSpPr>
-          <p:cNvPr id="725663696" name="Footer Placeholder 5"/>
+          <p:cNvPr id="212180992" name="Footer Placeholder 5"/>
           <p:cNvSpPr>
             <a:spLocks noGrp="1"/>
           </p:cNvSpPr>
@@ -3831,7 +3831,7 @@
       </p:sp>
       <p:sp>
         <p:nvSpPr>
-          <p:cNvPr id="2134299193" name="Slide Number Placeholder 6"/>
+          <p:cNvPr id="627596441" name="Slide Number Placeholder 6"/>
           <p:cNvSpPr>
             <a:spLocks noGrp="1"/>
           </p:cNvSpPr>
@@ -3882,7 +3882,7 @@
       </p:grpSpPr>
       <p:sp>
         <p:nvSpPr>
-          <p:cNvPr id="1264750433" name="Title 1"/>
+          <p:cNvPr id="1562635953" name="Title 1"/>
           <p:cNvSpPr>
             <a:spLocks noGrp="1"/>
           </p:cNvSpPr>
@@ -3913,7 +3913,7 @@
       </p:sp>
       <p:sp>
         <p:nvSpPr>
-          <p:cNvPr id="1686372313" name="Text Placeholder 2"/>
+          <p:cNvPr id="1738413096" name="Text Placeholder 2"/>
           <p:cNvSpPr>
             <a:spLocks noGrp="1"/>
           </p:cNvSpPr>
@@ -3981,7 +3981,7 @@
       </p:sp>
       <p:sp>
         <p:nvSpPr>
-          <p:cNvPr id="1930235076" name="Content Placeholder 3"/>
+          <p:cNvPr id="442198690" name="Content Placeholder 3"/>
           <p:cNvSpPr>
             <a:spLocks noGrp="1"/>
           </p:cNvSpPr>
@@ -4052,7 +4052,7 @@
       </p:sp>
       <p:sp>
         <p:nvSpPr>
-          <p:cNvPr id="566123793" name="Text Placeholder 4"/>
+          <p:cNvPr id="2027871992" name="Text Placeholder 4"/>
           <p:cNvSpPr>
             <a:spLocks noGrp="1"/>
           </p:cNvSpPr>
@@ -4120,7 +4120,7 @@
       </p:sp>
       <p:sp>
         <p:nvSpPr>
-          <p:cNvPr id="923711004" name="Content Placeholder 5"/>
+          <p:cNvPr id="1059174459" name="Content Placeholder 5"/>
           <p:cNvSpPr>
             <a:spLocks noGrp="1"/>
           </p:cNvSpPr>
@@ -4191,7 +4191,7 @@
       </p:sp>
       <p:sp>
         <p:nvSpPr>
-          <p:cNvPr id="186768762" name="Date Placeholder 6"/>
+          <p:cNvPr id="1165965579" name="Date Placeholder 6"/>
           <p:cNvSpPr>
             <a:spLocks noGrp="1"/>
           </p:cNvSpPr>
@@ -4217,7 +4217,7 @@
       </p:sp>
       <p:sp>
         <p:nvSpPr>
-          <p:cNvPr id="904054967" name="Footer Placeholder 7"/>
+          <p:cNvPr id="1194097731" name="Footer Placeholder 7"/>
           <p:cNvSpPr>
             <a:spLocks noGrp="1"/>
           </p:cNvSpPr>
@@ -4239,7 +4239,7 @@
       </p:sp>
       <p:sp>
         <p:nvSpPr>
-          <p:cNvPr id="2049381053" name="Slide Number Placeholder 8"/>
+          <p:cNvPr id="1433399644" name="Slide Number Placeholder 8"/>
           <p:cNvSpPr>
             <a:spLocks noGrp="1"/>
           </p:cNvSpPr>
@@ -4290,7 +4290,7 @@
       </p:grpSpPr>
       <p:sp>
         <p:nvSpPr>
-          <p:cNvPr id="745692850" name="Title 1"/>
+          <p:cNvPr id="1907215447" name="Title 1"/>
           <p:cNvSpPr>
             <a:spLocks noGrp="1"/>
           </p:cNvSpPr>
@@ -4316,7 +4316,7 @@
       </p:sp>
       <p:sp>
         <p:nvSpPr>
-          <p:cNvPr id="253765258" name="Date Placeholder 2"/>
+          <p:cNvPr id="209631773" name="Date Placeholder 2"/>
           <p:cNvSpPr>
             <a:spLocks noGrp="1"/>
           </p:cNvSpPr>
@@ -4342,7 +4342,7 @@
       </p:sp>
       <p:sp>
         <p:nvSpPr>
-          <p:cNvPr id="906290111" name="Footer Placeholder 3"/>
+          <p:cNvPr id="1511927308" name="Footer Placeholder 3"/>
           <p:cNvSpPr>
             <a:spLocks noGrp="1"/>
           </p:cNvSpPr>
@@ -4364,7 +4364,7 @@
       </p:sp>
       <p:sp>
         <p:nvSpPr>
-          <p:cNvPr id="562282820" name="Slide Number Placeholder 4"/>
+          <p:cNvPr id="600652247" name="Slide Number Placeholder 4"/>
           <p:cNvSpPr>
             <a:spLocks noGrp="1"/>
           </p:cNvSpPr>
@@ -4415,7 +4415,7 @@
       </p:grpSpPr>
       <p:sp>
         <p:nvSpPr>
-          <p:cNvPr id="883480525" name="Date Placeholder 1"/>
+          <p:cNvPr id="186910435" name="Date Placeholder 1"/>
           <p:cNvSpPr>
             <a:spLocks noGrp="1"/>
           </p:cNvSpPr>
@@ -4441,7 +4441,7 @@
       </p:sp>
       <p:sp>
         <p:nvSpPr>
-          <p:cNvPr id="672507221" name="Footer Placeholder 2"/>
+          <p:cNvPr id="705300532" name="Footer Placeholder 2"/>
           <p:cNvSpPr>
             <a:spLocks noGrp="1"/>
           </p:cNvSpPr>
@@ -4463,7 +4463,7 @@
       </p:sp>
       <p:sp>
         <p:nvSpPr>
-          <p:cNvPr id="1431150256" name="Slide Number Placeholder 3"/>
+          <p:cNvPr id="1380954955" name="Slide Number Placeholder 3"/>
           <p:cNvSpPr>
             <a:spLocks noGrp="1"/>
           </p:cNvSpPr>
@@ -4514,7 +4514,7 @@
       </p:grpSpPr>
       <p:sp>
         <p:nvSpPr>
-          <p:cNvPr id="455132299" name="Title 1"/>
+          <p:cNvPr id="1966295307" name="Title 1"/>
           <p:cNvSpPr>
             <a:spLocks noGrp="1"/>
           </p:cNvSpPr>
@@ -4549,7 +4549,7 @@
       </p:sp>
       <p:sp>
         <p:nvSpPr>
-          <p:cNvPr id="482798630" name="Content Placeholder 2"/>
+          <p:cNvPr id="2121523500" name="Content Placeholder 2"/>
           <p:cNvSpPr>
             <a:spLocks noGrp="1"/>
           </p:cNvSpPr>
@@ -4648,7 +4648,7 @@
       </p:sp>
       <p:sp>
         <p:nvSpPr>
-          <p:cNvPr id="1006971447" name="Text Placeholder 3"/>
+          <p:cNvPr id="719053220" name="Text Placeholder 3"/>
           <p:cNvSpPr>
             <a:spLocks noGrp="1"/>
           </p:cNvSpPr>
@@ -4716,7 +4716,7 @@
       </p:sp>
       <p:sp>
         <p:nvSpPr>
-          <p:cNvPr id="681051101" name="Date Placeholder 4"/>
+          <p:cNvPr id="1041845998" name="Date Placeholder 4"/>
           <p:cNvSpPr>
             <a:spLocks noGrp="1"/>
           </p:cNvSpPr>
@@ -4742,7 +4742,7 @@
       </p:sp>
       <p:sp>
         <p:nvSpPr>
-          <p:cNvPr id="1693961581" name="Footer Placeholder 5"/>
+          <p:cNvPr id="1051902982" name="Footer Placeholder 5"/>
           <p:cNvSpPr>
             <a:spLocks noGrp="1"/>
           </p:cNvSpPr>
@@ -4764,7 +4764,7 @@
       </p:sp>
       <p:sp>
         <p:nvSpPr>
-          <p:cNvPr id="2009204580" name="Slide Number Placeholder 6"/>
+          <p:cNvPr id="1698976010" name="Slide Number Placeholder 6"/>
           <p:cNvSpPr>
             <a:spLocks noGrp="1"/>
           </p:cNvSpPr>
@@ -4815,7 +4815,7 @@
       </p:grpSpPr>
       <p:sp>
         <p:nvSpPr>
-          <p:cNvPr id="1564403282" name="Title 1"/>
+          <p:cNvPr id="1193092738" name="Title 1"/>
           <p:cNvSpPr>
             <a:spLocks noGrp="1"/>
           </p:cNvSpPr>
@@ -4850,7 +4850,7 @@
       </p:sp>
       <p:sp>
         <p:nvSpPr>
-          <p:cNvPr id="203130981" name="Picture Placeholder 2"/>
+          <p:cNvPr id="762086209" name="Picture Placeholder 2"/>
           <p:cNvSpPr>
             <a:spLocks noChangeAspect="1" noGrp="1"/>
           </p:cNvSpPr>
@@ -4918,7 +4918,7 @@
       </p:sp>
       <p:sp>
         <p:nvSpPr>
-          <p:cNvPr id="689421187" name="Text Placeholder 3"/>
+          <p:cNvPr id="1790498667" name="Text Placeholder 3"/>
           <p:cNvSpPr>
             <a:spLocks noGrp="1"/>
           </p:cNvSpPr>
@@ -4986,7 +4986,7 @@
       </p:sp>
       <p:sp>
         <p:nvSpPr>
-          <p:cNvPr id="286748648" name="Date Placeholder 4"/>
+          <p:cNvPr id="246664225" name="Date Placeholder 4"/>
           <p:cNvSpPr>
             <a:spLocks noGrp="1"/>
           </p:cNvSpPr>
@@ -5012,7 +5012,7 @@
       </p:sp>
       <p:sp>
         <p:nvSpPr>
-          <p:cNvPr id="910633900" name="Footer Placeholder 5"/>
+          <p:cNvPr id="1962998781" name="Footer Placeholder 5"/>
           <p:cNvSpPr>
             <a:spLocks noGrp="1"/>
           </p:cNvSpPr>
@@ -5034,7 +5034,7 @@
       </p:sp>
       <p:sp>
         <p:nvSpPr>
-          <p:cNvPr id="569947782" name="Slide Number Placeholder 6"/>
+          <p:cNvPr id="209532781" name="Slide Number Placeholder 6"/>
           <p:cNvSpPr>
             <a:spLocks noGrp="1"/>
           </p:cNvSpPr>
@@ -5096,7 +5096,7 @@
       </p:grpSpPr>
       <p:sp>
         <p:nvSpPr>
-          <p:cNvPr id="1216738752" name="Title Placeholder 1"/>
+          <p:cNvPr id="1127286564" name="Title Placeholder 1"/>
           <p:cNvSpPr>
             <a:spLocks noGrp="1"/>
           </p:cNvSpPr>
@@ -5132,7 +5132,7 @@
       </p:sp>
       <p:sp>
         <p:nvSpPr>
-          <p:cNvPr id="1341504257" name="Text Placeholder 2"/>
+          <p:cNvPr id="111048553" name="Text Placeholder 2"/>
           <p:cNvSpPr>
             <a:spLocks noGrp="1"/>
           </p:cNvSpPr>
@@ -5208,7 +5208,7 @@
       </p:sp>
       <p:sp>
         <p:nvSpPr>
-          <p:cNvPr id="404376647" name="Date Placeholder 3"/>
+          <p:cNvPr id="1313699921" name="Date Placeholder 3"/>
           <p:cNvSpPr>
             <a:spLocks noGrp="1"/>
           </p:cNvSpPr>
@@ -5252,7 +5252,7 @@
       </p:sp>
       <p:sp>
         <p:nvSpPr>
-          <p:cNvPr id="120916256" name="Footer Placeholder 4"/>
+          <p:cNvPr id="1591518777" name="Footer Placeholder 4"/>
           <p:cNvSpPr>
             <a:spLocks noGrp="1"/>
           </p:cNvSpPr>
@@ -5292,7 +5292,7 @@
       </p:sp>
       <p:sp>
         <p:nvSpPr>
-          <p:cNvPr id="1476943642" name="Slide Number Placeholder 5"/>
+          <p:cNvPr id="1527332821" name="Slide Number Placeholder 5"/>
           <p:cNvSpPr>
             <a:spLocks noGrp="1"/>
           </p:cNvSpPr>
@@ -5652,7 +5652,7 @@
       </p:grpSpPr>
       <p:pic>
         <p:nvPicPr>
-          <p:cNvPr id="646676060" name="Рисунок 1688401028"/>
+          <p:cNvPr id="473013598" name="Рисунок 1688401028"/>
           <p:cNvPicPr>
             <a:picLocks noChangeAspect="1"/>
           </p:cNvPicPr>
@@ -5676,7 +5676,7 @@
       </p:pic>
       <p:sp>
         <p:nvSpPr>
-          <p:cNvPr id="1500322553" name="Title 1"/>
+          <p:cNvPr id="1484618345" name="Title 1"/>
           <p:cNvSpPr>
             <a:spLocks noGrp="1"/>
           </p:cNvSpPr>
@@ -5726,7 +5726,7 @@
       </p:sp>
       <p:sp>
         <p:nvSpPr>
-          <p:cNvPr id="2123735608" name="Subtitle 2"/>
+          <p:cNvPr id="1412392924" name="Subtitle 2"/>
           <p:cNvSpPr>
             <a:spLocks noGrp="1"/>
           </p:cNvSpPr>
@@ -5848,7 +5848,7 @@
       </p:grpSpPr>
       <p:sp>
         <p:nvSpPr>
-          <p:cNvPr id="1703224139" name="Title 1"/>
+          <p:cNvPr id="878450679" name="Title 1"/>
           <p:cNvSpPr>
             <a:spLocks noGrp="1"/>
           </p:cNvSpPr>
@@ -5911,7 +5911,7 @@
       </p:sp>
       <p:sp>
         <p:nvSpPr>
-          <p:cNvPr id="62110294" name="Content Placeholder 2"/>
+          <p:cNvPr id="109349070" name="Content Placeholder 2"/>
           <p:cNvSpPr>
             <a:spLocks noGrp="1"/>
           </p:cNvSpPr>
@@ -6173,7 +6173,7 @@
       </p:sp>
       <p:pic>
         <p:nvPicPr>
-          <p:cNvPr id="532962071" name="Рисунок 2"/>
+          <p:cNvPr id="1690930362" name="Рисунок 2"/>
           <p:cNvPicPr>
             <a:picLocks noChangeAspect="1"/>
           </p:cNvPicPr>
@@ -6195,7 +6195,7 @@
       </p:pic>
       <p:sp>
         <p:nvSpPr>
-          <p:cNvPr id="569480570" name="Content Placeholder 2"/>
+          <p:cNvPr id="403503335" name="Content Placeholder 2"/>
           <p:cNvSpPr txBox="1"/>
           <p:nvPr/>
         </p:nvSpPr>
@@ -6456,7 +6456,7 @@
       </p:grpSpPr>
       <p:sp>
         <p:nvSpPr>
-          <p:cNvPr id="329860221" name="Title 1"/>
+          <p:cNvPr id="1250499190" name="Title 1"/>
           <p:cNvSpPr>
             <a:spLocks noGrp="1"/>
           </p:cNvSpPr>
@@ -6518,7 +6518,7 @@
       </p:sp>
       <p:sp>
         <p:nvSpPr>
-          <p:cNvPr id="1474753825" name="Content Placeholder 2"/>
+          <p:cNvPr id="617585833" name="Content Placeholder 2"/>
           <p:cNvSpPr>
             <a:spLocks noGrp="1"/>
           </p:cNvSpPr>
@@ -6886,7 +6886,7 @@
       </p:sp>
       <p:pic>
         <p:nvPicPr>
-          <p:cNvPr id="1474575160" name="Рисунок 2"/>
+          <p:cNvPr id="333831470" name="Рисунок 2"/>
           <p:cNvPicPr>
             <a:picLocks noChangeAspect="1"/>
           </p:cNvPicPr>
@@ -6908,7 +6908,7 @@
       </p:pic>
       <p:sp>
         <p:nvSpPr>
-          <p:cNvPr id="655886163" name="Content Placeholder 2"/>
+          <p:cNvPr id="569438217" name="Content Placeholder 2"/>
           <p:cNvSpPr txBox="1"/>
           <p:nvPr/>
         </p:nvSpPr>
@@ -7169,7 +7169,7 @@
       </p:grpSpPr>
       <p:sp>
         <p:nvSpPr>
-          <p:cNvPr id="1958892704" name="Title 1"/>
+          <p:cNvPr id="889507558" name="Title 1"/>
           <p:cNvSpPr>
             <a:spLocks noGrp="1"/>
           </p:cNvSpPr>
@@ -7217,7 +7217,7 @@
       </p:sp>
       <p:graphicFrame>
         <p:nvGraphicFramePr>
-          <p:cNvPr id="2058024914" name="Объект 733749699"/>
+          <p:cNvPr id="748629018" name="Объект 733749699"/>
           <p:cNvGraphicFramePr>
             <a:graphicFrameLocks xmlns:a="http://schemas.openxmlformats.org/drawingml/2006/main" noGrp="1"/>
           </p:cNvGraphicFramePr>
@@ -8057,7 +8057,7 @@
       </p:graphicFrame>
       <p:sp>
         <p:nvSpPr>
-          <p:cNvPr id="256145827" name="TextBox 344607669"/>
+          <p:cNvPr id="1710367045" name="TextBox 344607669"/>
           <p:cNvSpPr txBox="1"/>
           <p:nvPr/>
         </p:nvSpPr>
@@ -8180,7 +8180,7 @@
       </p:grpSpPr>
       <p:sp>
         <p:nvSpPr>
-          <p:cNvPr id="94297318" name="Title 1"/>
+          <p:cNvPr id="1689778180" name="Title 1"/>
           <p:cNvSpPr>
             <a:spLocks noGrp="1"/>
           </p:cNvSpPr>
@@ -8256,7 +8256,7 @@
       </p:sp>
       <p:sp>
         <p:nvSpPr>
-          <p:cNvPr id="357989828" name="Content Placeholder 2"/>
+          <p:cNvPr id="1372992517" name="Content Placeholder 2"/>
           <p:cNvSpPr>
             <a:spLocks noGrp="1"/>
           </p:cNvSpPr>
@@ -8414,7 +8414,7 @@
       </p:grpSpPr>
       <p:sp>
         <p:nvSpPr>
-          <p:cNvPr id="2059091854" name="Title 1"/>
+          <p:cNvPr id="782774041" name="Title 1"/>
           <p:cNvSpPr>
             <a:spLocks noGrp="1"/>
           </p:cNvSpPr>
@@ -8515,7 +8515,7 @@
       </p:sp>
       <p:sp>
         <p:nvSpPr>
-          <p:cNvPr id="1524489156" name="Content Placeholder 2"/>
+          <p:cNvPr id="654045161" name="Content Placeholder 2"/>
           <p:cNvSpPr>
             <a:spLocks noGrp="1"/>
           </p:cNvSpPr>
@@ -8663,7 +8663,7 @@
       </p:grpSpPr>
       <p:sp>
         <p:nvSpPr>
-          <p:cNvPr id="838381963" name="Title 1"/>
+          <p:cNvPr id="682376172" name="Title 1"/>
           <p:cNvSpPr>
             <a:spLocks noGrp="1"/>
           </p:cNvSpPr>
@@ -8752,7 +8752,7 @@
       </p:sp>
       <p:sp>
         <p:nvSpPr>
-          <p:cNvPr id="319202789" name="Content Placeholder 2"/>
+          <p:cNvPr id="965288034" name="Content Placeholder 2"/>
           <p:cNvSpPr>
             <a:spLocks noGrp="1"/>
           </p:cNvSpPr>
@@ -9190,7 +9190,7 @@
       </p:sp>
       <p:pic>
         <p:nvPicPr>
-          <p:cNvPr id="1771091417" name="Рисунок 1"/>
+          <p:cNvPr id="1346054678" name="Рисунок 1"/>
           <p:cNvPicPr>
             <a:picLocks noChangeAspect="1"/>
           </p:cNvPicPr>
@@ -9245,7 +9245,7 @@
       </p:grpSpPr>
       <p:sp>
         <p:nvSpPr>
-          <p:cNvPr id="844458425" name="Title 1"/>
+          <p:cNvPr id="1958443909" name="Title 1"/>
           <p:cNvSpPr>
             <a:spLocks noGrp="1"/>
           </p:cNvSpPr>
@@ -9308,7 +9308,7 @@
       </p:sp>
       <p:sp>
         <p:nvSpPr>
-          <p:cNvPr id="618814455" name="Content Placeholder 2"/>
+          <p:cNvPr id="393454434" name="Content Placeholder 2"/>
           <p:cNvSpPr>
             <a:spLocks noGrp="1"/>
           </p:cNvSpPr>
@@ -9718,7 +9718,7 @@
       </p:sp>
       <p:pic>
         <p:nvPicPr>
-          <p:cNvPr id="93557949" name="Рисунок 1"/>
+          <p:cNvPr id="1927792985" name="Рисунок 1"/>
           <p:cNvPicPr>
             <a:picLocks noChangeAspect="1"/>
           </p:cNvPicPr>
@@ -9740,7 +9740,7 @@
       </p:pic>
       <p:pic>
         <p:nvPicPr>
-          <p:cNvPr id="1714788417" name="Рисунок 3"/>
+          <p:cNvPr id="401936036" name="Рисунок 3"/>
           <p:cNvPicPr>
             <a:picLocks noChangeAspect="1"/>
           </p:cNvPicPr>
@@ -9795,7 +9795,7 @@
       </p:grpSpPr>
       <p:sp>
         <p:nvSpPr>
-          <p:cNvPr id="2111306744" name="Title 1"/>
+          <p:cNvPr id="1259574966" name="Title 1"/>
           <p:cNvSpPr>
             <a:spLocks noGrp="1"/>
           </p:cNvSpPr>
@@ -9922,7 +9922,7 @@
       </p:sp>
       <p:sp>
         <p:nvSpPr>
-          <p:cNvPr id="762535361" name="Content Placeholder 2"/>
+          <p:cNvPr id="1176422339" name="Content Placeholder 2"/>
           <p:cNvSpPr>
             <a:spLocks noGrp="1"/>
           </p:cNvSpPr>
@@ -10473,7 +10473,7 @@
                 <a:latin typeface="URW Gothic"/>
                 <a:cs typeface="URW Gothic"/>
               </a:rPr>
-              <a:t>ядро свертки со значениями </a:t>
+              <a:t>матрица ядерной функции со значениями 		       </a:t>
             </a:r>
             <a:endParaRPr sz="2600"/>
           </a:p>
@@ -10739,7 +10739,7 @@
       </p:sp>
       <p:pic>
         <p:nvPicPr>
-          <p:cNvPr id="210050458" name="Рисунок 2"/>
+          <p:cNvPr id="978404415" name="Рисунок 2"/>
           <p:cNvPicPr>
             <a:picLocks noChangeAspect="1"/>
           </p:cNvPicPr>
@@ -10761,7 +10761,7 @@
       </p:pic>
       <p:pic>
         <p:nvPicPr>
-          <p:cNvPr id="859580843" name="Рисунок 4"/>
+          <p:cNvPr id="661339572" name="Рисунок 4"/>
           <p:cNvPicPr>
             <a:picLocks noChangeAspect="1"/>
           </p:cNvPicPr>
@@ -10773,7 +10773,7 @@
         </p:blipFill>
         <p:spPr bwMode="auto">
           <a:xfrm>
-            <a:off x="6853449" y="4793389"/>
+            <a:off x="8850035" y="4793388"/>
             <a:ext cx="1752843" cy="362000"/>
           </a:xfrm>
           <a:prstGeom prst="rect">
@@ -10816,7 +10816,7 @@
       </p:grpSpPr>
       <p:sp>
         <p:nvSpPr>
-          <p:cNvPr id="1674590635" name="Title 1"/>
+          <p:cNvPr id="1415824132" name="Title 1"/>
           <p:cNvSpPr>
             <a:spLocks noGrp="1"/>
           </p:cNvSpPr>
@@ -10879,7 +10879,7 @@
       </p:sp>
       <p:sp>
         <p:nvSpPr>
-          <p:cNvPr id="1428321918" name="Content Placeholder 2"/>
+          <p:cNvPr id="2023092361" name="Content Placeholder 2"/>
           <p:cNvSpPr>
             <a:spLocks noGrp="1"/>
           </p:cNvSpPr>
@@ -11001,7 +11001,7 @@
                 <a:latin typeface="URW Gothic"/>
                 <a:cs typeface="URW Gothic"/>
               </a:rPr>
-              <a:t>Большинство используемых ядер свертки сохраняют циркулянтный характер, что позволяет применить то же свойство дискретного преобразования Фурье и снизить сложность алгоритма до </a:t>
+              <a:t>Большинство используемых ядерных функций сохраняют циркулянтный характер в матрице, что позволяет применить то же свойство дискретного преобразования Фурье и снизить сложность алгоритма до </a:t>
             </a:r>
             <mc:AlternateContent xmlns:mc="http://schemas.openxmlformats.org/markup-compatibility/2006" xmlns:m="http://schemas.openxmlformats.org/officeDocument/2006/math">
               <mc:Choice xmlns:a14="http://schemas.microsoft.com/office/drawing/2010/main" Requires="a14">
@@ -11264,7 +11264,7 @@
       </p:sp>
       <p:pic>
         <p:nvPicPr>
-          <p:cNvPr id="443990457" name="Рисунок 1"/>
+          <p:cNvPr id="1497413676" name="Рисунок 1"/>
           <p:cNvPicPr>
             <a:picLocks noChangeAspect="1"/>
           </p:cNvPicPr>
@@ -11286,7 +11286,7 @@
       </p:pic>
       <p:pic>
         <p:nvPicPr>
-          <p:cNvPr id="2003031651" name="Рисунок 3"/>
+          <p:cNvPr id="791780044" name="Рисунок 3"/>
           <p:cNvPicPr>
             <a:picLocks noChangeAspect="1"/>
           </p:cNvPicPr>
@@ -11341,7 +11341,7 @@
       </p:grpSpPr>
       <p:sp>
         <p:nvSpPr>
-          <p:cNvPr id="1805737325" name="Title 1"/>
+          <p:cNvPr id="1400600715" name="Title 1"/>
           <p:cNvSpPr>
             <a:spLocks noGrp="1"/>
           </p:cNvSpPr>
@@ -11455,7 +11455,7 @@
       </p:sp>
       <p:sp>
         <p:nvSpPr>
-          <p:cNvPr id="457492274" name="Content Placeholder 2"/>
+          <p:cNvPr id="404881574" name="Content Placeholder 2"/>
           <p:cNvSpPr>
             <a:spLocks noGrp="1"/>
           </p:cNvSpPr>
@@ -11694,7 +11694,7 @@
       </p:grpSpPr>
       <p:pic>
         <p:nvPicPr>
-          <p:cNvPr id="756284328" name="Рисунок 397527993"/>
+          <p:cNvPr id="97951362" name="Рисунок 397527993"/>
           <p:cNvPicPr>
             <a:picLocks noChangeAspect="1"/>
           </p:cNvPicPr>
@@ -11716,7 +11716,7 @@
       </p:pic>
       <p:sp>
         <p:nvSpPr>
-          <p:cNvPr id="658073851" name="Title 1"/>
+          <p:cNvPr id="1564710059" name="Title 1"/>
           <p:cNvSpPr>
             <a:spLocks noGrp="1"/>
           </p:cNvSpPr>
@@ -11766,7 +11766,7 @@
       </p:sp>
       <p:sp>
         <p:nvSpPr>
-          <p:cNvPr id="476633561" name="Content Placeholder 2"/>
+          <p:cNvPr id="2118155470" name="Content Placeholder 2"/>
           <p:cNvSpPr>
             <a:spLocks noGrp="1"/>
           </p:cNvSpPr>
@@ -11967,7 +11967,7 @@
       </p:sp>
       <p:sp>
         <p:nvSpPr>
-          <p:cNvPr id="874219197" name="TextBox 2010699868"/>
+          <p:cNvPr id="394359630" name="TextBox 2010699868"/>
           <p:cNvSpPr txBox="1"/>
           <p:nvPr/>
         </p:nvSpPr>
@@ -12019,7 +12019,7 @@
       </p:sp>
       <p:pic>
         <p:nvPicPr>
-          <p:cNvPr id="424155254" name="Рисунок 1316378864"/>
+          <p:cNvPr id="1612527640" name=""/>
           <p:cNvPicPr>
             <a:picLocks noChangeAspect="1"/>
           </p:cNvPicPr>
@@ -12027,12 +12027,13 @@
         </p:nvPicPr>
         <p:blipFill rotWithShape="1">
           <a:blip r:embed="rId4"/>
+          <a:srcRect l="812" t="0" r="0" b="0"/>
           <a:stretch/>
         </p:blipFill>
         <p:spPr bwMode="auto">
-          <a:xfrm>
-            <a:off x="7471495" y="500397"/>
-            <a:ext cx="3882302" cy="2210563"/>
+          <a:xfrm flipH="0" flipV="0">
+            <a:off x="7471494" y="1795696"/>
+            <a:ext cx="3882301" cy="2201680"/>
           </a:xfrm>
           <a:prstGeom prst="rect">
             <a:avLst/>
@@ -12041,7 +12042,7 @@
       </p:pic>
       <p:pic>
         <p:nvPicPr>
-          <p:cNvPr id="1487747418" name="Рисунок 640668727"/>
+          <p:cNvPr id="759099291" name=""/>
           <p:cNvPicPr>
             <a:picLocks noChangeAspect="1"/>
           </p:cNvPicPr>
@@ -12049,12 +12050,13 @@
         </p:nvPicPr>
         <p:blipFill rotWithShape="1">
           <a:blip r:embed="rId5"/>
+          <a:srcRect l="1478" t="0" r="0" b="0"/>
           <a:stretch/>
         </p:blipFill>
         <p:spPr bwMode="auto">
-          <a:xfrm>
-            <a:off x="7459350" y="2282908"/>
-            <a:ext cx="3894449" cy="1995905"/>
+          <a:xfrm flipH="0" flipV="0">
+            <a:off x="7471494" y="324786"/>
+            <a:ext cx="3861693" cy="2204803"/>
           </a:xfrm>
           <a:prstGeom prst="rect">
             <a:avLst/>
@@ -12096,7 +12098,7 @@
       </p:grpSpPr>
       <p:sp>
         <p:nvSpPr>
-          <p:cNvPr id="99511847" name="Title 1"/>
+          <p:cNvPr id="650278815" name="Title 1"/>
           <p:cNvSpPr>
             <a:spLocks noGrp="1"/>
           </p:cNvSpPr>
@@ -12159,7 +12161,7 @@
       </p:sp>
       <p:sp>
         <p:nvSpPr>
-          <p:cNvPr id="41982097" name="Content Placeholder 2"/>
+          <p:cNvPr id="294614666" name="Content Placeholder 2"/>
           <p:cNvSpPr>
             <a:spLocks noGrp="1"/>
           </p:cNvSpPr>
@@ -12411,7 +12413,7 @@
       </p:grpSpPr>
       <p:sp>
         <p:nvSpPr>
-          <p:cNvPr id="2070946777" name="Title 1"/>
+          <p:cNvPr id="596592943" name="Title 1"/>
           <p:cNvSpPr>
             <a:spLocks noGrp="1"/>
           </p:cNvSpPr>
@@ -12474,7 +12476,7 @@
       </p:sp>
       <p:sp>
         <p:nvSpPr>
-          <p:cNvPr id="1353182416" name="Content Placeholder 2"/>
+          <p:cNvPr id="1591785575" name="Content Placeholder 2"/>
           <p:cNvSpPr>
             <a:spLocks noGrp="1"/>
           </p:cNvSpPr>
@@ -12997,7 +12999,7 @@
       </p:grpSpPr>
       <p:sp>
         <p:nvSpPr>
-          <p:cNvPr id="934395504" name="Title 1"/>
+          <p:cNvPr id="952970808" name="Title 1"/>
           <p:cNvSpPr>
             <a:spLocks noGrp="1"/>
           </p:cNvSpPr>
@@ -13071,7 +13073,7 @@
       </p:sp>
       <p:graphicFrame>
         <p:nvGraphicFramePr>
-          <p:cNvPr id="1397842624" name="Объект 637855372"/>
+          <p:cNvPr id="1019371119" name="Объект 637855372"/>
           <p:cNvGraphicFramePr>
             <a:graphicFrameLocks xmlns:a="http://schemas.openxmlformats.org/drawingml/2006/main" noGrp="1"/>
           </p:cNvGraphicFramePr>
@@ -13840,7 +13842,7 @@
       </p:graphicFrame>
       <p:sp>
         <p:nvSpPr>
-          <p:cNvPr id="809145521" name="TextBox 2002109277"/>
+          <p:cNvPr id="231791330" name="TextBox 2002109277"/>
           <p:cNvSpPr txBox="1"/>
           <p:nvPr/>
         </p:nvSpPr>
@@ -13975,7 +13977,7 @@
       </p:grpSpPr>
       <p:sp>
         <p:nvSpPr>
-          <p:cNvPr id="1772165223" name="Title 1"/>
+          <p:cNvPr id="1883216490" name="Title 1"/>
           <p:cNvSpPr>
             <a:spLocks noGrp="1"/>
           </p:cNvSpPr>
@@ -14049,7 +14051,7 @@
       </p:sp>
       <p:graphicFrame>
         <p:nvGraphicFramePr>
-          <p:cNvPr id="1521776879" name="Объект 2094460864"/>
+          <p:cNvPr id="436116922" name="Объект 2094460864"/>
           <p:cNvGraphicFramePr>
             <a:graphicFrameLocks xmlns:a="http://schemas.openxmlformats.org/drawingml/2006/main" noGrp="1"/>
           </p:cNvGraphicFramePr>
@@ -14617,7 +14619,7 @@
       </p:graphicFrame>
       <p:sp>
         <p:nvSpPr>
-          <p:cNvPr id="1688095348" name="TextBox 1242572389"/>
+          <p:cNvPr id="1328534893" name="TextBox 1242572389"/>
           <p:cNvSpPr txBox="1"/>
           <p:nvPr/>
         </p:nvSpPr>
@@ -14719,7 +14721,7 @@
       </p:sp>
       <p:sp>
         <p:nvSpPr>
-          <p:cNvPr id="1508392383" name="TextBox 1380296414"/>
+          <p:cNvPr id="78478702" name="TextBox 1380296414"/>
           <p:cNvSpPr txBox="1"/>
           <p:nvPr/>
         </p:nvSpPr>
@@ -14848,7 +14850,7 @@
       </p:grpSpPr>
       <p:sp>
         <p:nvSpPr>
-          <p:cNvPr id="1441753539" name="Title 1"/>
+          <p:cNvPr id="288661958" name="Title 1"/>
           <p:cNvSpPr>
             <a:spLocks noGrp="1"/>
           </p:cNvSpPr>
@@ -14909,7 +14911,7 @@
       </p:sp>
       <p:pic>
         <p:nvPicPr>
-          <p:cNvPr id="375206525" name="Объект 1"/>
+          <p:cNvPr id="1132114832" name="Объект 1"/>
           <p:cNvPicPr>
             <a:picLocks noChangeAspect="1" noGrp="1"/>
           </p:cNvPicPr>
@@ -14933,7 +14935,7 @@
       </p:pic>
       <p:pic>
         <p:nvPicPr>
-          <p:cNvPr id="1325487030" name="Рисунок 2"/>
+          <p:cNvPr id="1625096752" name="Рисунок 2"/>
           <p:cNvPicPr>
             <a:picLocks noChangeAspect="1"/>
           </p:cNvPicPr>
@@ -14955,7 +14957,7 @@
       </p:pic>
       <p:pic>
         <p:nvPicPr>
-          <p:cNvPr id="730963394" name="Рисунок 4"/>
+          <p:cNvPr id="97656491" name="Рисунок 4"/>
           <p:cNvPicPr>
             <a:picLocks noChangeAspect="1"/>
           </p:cNvPicPr>
@@ -14977,7 +14979,7 @@
       </p:pic>
       <p:pic>
         <p:nvPicPr>
-          <p:cNvPr id="505388118" name="Рисунок 5"/>
+          <p:cNvPr id="1227259930" name="Рисунок 5"/>
           <p:cNvPicPr>
             <a:picLocks noChangeAspect="1"/>
           </p:cNvPicPr>
@@ -14999,7 +15001,7 @@
       </p:pic>
       <p:pic>
         <p:nvPicPr>
-          <p:cNvPr id="1421938144" name="Рисунок 3"/>
+          <p:cNvPr id="1705819878" name="Рисунок 3"/>
           <p:cNvPicPr>
             <a:picLocks noChangeAspect="1"/>
           </p:cNvPicPr>
@@ -15065,7 +15067,7 @@
       </p:grpSpPr>
       <p:sp>
         <p:nvSpPr>
-          <p:cNvPr id="835372132" name="Title 1"/>
+          <p:cNvPr id="1194803591" name="Title 1"/>
           <p:cNvSpPr>
             <a:spLocks noGrp="1"/>
           </p:cNvSpPr>
@@ -15115,7 +15117,7 @@
       </p:sp>
       <p:graphicFrame>
         <p:nvGraphicFramePr>
-          <p:cNvPr id="478784581" name="Объект 310771180"/>
+          <p:cNvPr id="1205911088" name="Объект 310771180"/>
           <p:cNvGraphicFramePr>
             <a:graphicFrameLocks xmlns:a="http://schemas.openxmlformats.org/drawingml/2006/main" noGrp="1"/>
           </p:cNvGraphicFramePr>
@@ -16985,7 +16987,7 @@
       </p:graphicFrame>
       <p:sp>
         <p:nvSpPr>
-          <p:cNvPr id="1343749696" name="TextBox 1736205686"/>
+          <p:cNvPr id="196411396" name="TextBox 1736205686"/>
           <p:cNvSpPr txBox="1"/>
           <p:nvPr/>
         </p:nvSpPr>
@@ -17070,7 +17072,7 @@
       </p:grpSpPr>
       <p:sp>
         <p:nvSpPr>
-          <p:cNvPr id="435270975" name="Title 1"/>
+          <p:cNvPr id="1202231774" name="Title 1"/>
           <p:cNvSpPr>
             <a:spLocks noGrp="1"/>
           </p:cNvSpPr>
@@ -17144,7 +17146,7 @@
       </p:sp>
       <p:sp>
         <p:nvSpPr>
-          <p:cNvPr id="1725556552" name="Content Placeholder 2"/>
+          <p:cNvPr id="1351430673" name="Content Placeholder 2"/>
           <p:cNvSpPr>
             <a:spLocks noGrp="1"/>
           </p:cNvSpPr>
@@ -17442,7 +17444,7 @@
       </p:grpSpPr>
       <p:sp>
         <p:nvSpPr>
-          <p:cNvPr id="390584389" name="Title 1"/>
+          <p:cNvPr id="761111576" name="Title 1"/>
           <p:cNvSpPr>
             <a:spLocks noGrp="1"/>
           </p:cNvSpPr>
@@ -17516,7 +17518,7 @@
       </p:sp>
       <p:sp>
         <p:nvSpPr>
-          <p:cNvPr id="348740037" name="Content Placeholder 2"/>
+          <p:cNvPr id="629410853" name="Content Placeholder 2"/>
           <p:cNvSpPr>
             <a:spLocks noGrp="1"/>
           </p:cNvSpPr>
@@ -17754,7 +17756,7 @@
       </p:grpSpPr>
       <p:sp>
         <p:nvSpPr>
-          <p:cNvPr id="782619400" name="Title 1"/>
+          <p:cNvPr id="1594538970" name="Title 1"/>
           <p:cNvSpPr>
             <a:spLocks noGrp="1"/>
           </p:cNvSpPr>
@@ -17828,7 +17830,7 @@
       </p:sp>
       <p:sp>
         <p:nvSpPr>
-          <p:cNvPr id="1931973904" name="Content Placeholder 2"/>
+          <p:cNvPr id="1985601450" name="Content Placeholder 2"/>
           <p:cNvSpPr>
             <a:spLocks noGrp="1"/>
           </p:cNvSpPr>
@@ -17974,7 +17976,7 @@
       </p:grpSpPr>
       <p:sp>
         <p:nvSpPr>
-          <p:cNvPr id="856042152" name="Title 1"/>
+          <p:cNvPr id="2099827488" name="Title 1"/>
           <p:cNvSpPr>
             <a:spLocks noGrp="1"/>
           </p:cNvSpPr>
@@ -18037,7 +18039,7 @@
       </p:sp>
       <p:sp>
         <p:nvSpPr>
-          <p:cNvPr id="1655374901" name="Content Placeholder 2"/>
+          <p:cNvPr id="305895818" name="Content Placeholder 2"/>
           <p:cNvSpPr>
             <a:spLocks noGrp="1"/>
           </p:cNvSpPr>
@@ -18347,7 +18349,7 @@
       </p:sp>
       <p:pic>
         <p:nvPicPr>
-          <p:cNvPr id="836872255" name="Рисунок 1544504154"/>
+          <p:cNvPr id="524752368" name="Рисунок 1544504154"/>
           <p:cNvPicPr>
             <a:picLocks noChangeAspect="1"/>
           </p:cNvPicPr>
@@ -18369,7 +18371,7 @@
       </p:pic>
       <p:sp>
         <p:nvSpPr>
-          <p:cNvPr id="185667132" name="TextBox 1958282504"/>
+          <p:cNvPr id="1880737320" name="TextBox 1958282504"/>
           <p:cNvSpPr txBox="1"/>
           <p:nvPr/>
         </p:nvSpPr>
@@ -18474,7 +18476,7 @@
       </p:grpSpPr>
       <p:pic>
         <p:nvPicPr>
-          <p:cNvPr id="960829592" name="Рисунок 543137180"/>
+          <p:cNvPr id="1717684732" name="Рисунок 543137180"/>
           <p:cNvPicPr>
             <a:picLocks noChangeAspect="1"/>
           </p:cNvPicPr>
@@ -18496,7 +18498,7 @@
       </p:pic>
       <p:sp>
         <p:nvSpPr>
-          <p:cNvPr id="893560674" name="Title 1"/>
+          <p:cNvPr id="1763569317" name="Title 1"/>
           <p:cNvSpPr>
             <a:spLocks noGrp="1"/>
           </p:cNvSpPr>
@@ -18550,7 +18552,7 @@
       </p:sp>
       <p:sp>
         <p:nvSpPr>
-          <p:cNvPr id="1040949222" name="Content Placeholder 2"/>
+          <p:cNvPr id="137456560" name="Content Placeholder 2"/>
           <p:cNvSpPr>
             <a:spLocks noGrp="1"/>
           </p:cNvSpPr>
@@ -18856,7 +18858,7 @@
       </p:sp>
       <p:sp>
         <p:nvSpPr>
-          <p:cNvPr id="37995637" name="TextBox 1607286119"/>
+          <p:cNvPr id="267508217" name="TextBox 1607286119"/>
           <p:cNvSpPr txBox="1"/>
           <p:nvPr/>
         </p:nvSpPr>
@@ -18985,7 +18987,7 @@
       </p:grpSpPr>
       <p:sp>
         <p:nvSpPr>
-          <p:cNvPr id="889279096" name="Title 1"/>
+          <p:cNvPr id="866004717" name="Title 1"/>
           <p:cNvSpPr>
             <a:spLocks noGrp="1"/>
           </p:cNvSpPr>
@@ -19064,7 +19066,7 @@
       </p:sp>
       <p:sp>
         <p:nvSpPr>
-          <p:cNvPr id="432515623" name="Content Placeholder 2"/>
+          <p:cNvPr id="1995988443" name="Content Placeholder 2"/>
           <p:cNvSpPr>
             <a:spLocks noGrp="1"/>
           </p:cNvSpPr>
@@ -19592,7 +19594,7 @@
       </p:sp>
       <p:pic>
         <p:nvPicPr>
-          <p:cNvPr id="127273213" name="Рисунок 3"/>
+          <p:cNvPr id="43052710" name="Рисунок 3"/>
           <p:cNvPicPr>
             <a:picLocks noChangeAspect="1"/>
           </p:cNvPicPr>
@@ -19614,7 +19616,7 @@
       </p:pic>
       <p:sp>
         <p:nvSpPr>
-          <p:cNvPr id="1912549256" name="Content Placeholder 2"/>
+          <p:cNvPr id="1893015652" name="Content Placeholder 2"/>
           <p:cNvSpPr txBox="1"/>
           <p:nvPr/>
         </p:nvSpPr>
